--- a/protected-downloads/praesentation/TL01.pptx
+++ b/protected-downloads/praesentation/TL01.pptx
@@ -4857,7 +4857,7 @@
                 </a:solidFill>
                 <a:latin typeface="Arial"/>
               </a:rPr>
-              <a:t>v0.2</a:t>
+              <a:t>v1.0</a:t>
             </a:r>
           </a:p>
         </p:txBody>

--- a/protected-downloads/praesentation/TL01.pptx
+++ b/protected-downloads/praesentation/TL01.pptx
@@ -592,22 +592,17 @@
           <a:lstStyle/>
           <a:p>
             <a:r>
-              <a:t>Kein Rollenspiel. Textarbeit: Satz aufschreiben, laut vorlesen, Rückmeldung: 'Wenn ich das höre – will ich antworten oder mich verteidigen?'</a:t>
-            </a:r>
-          </a:p>
-          <a:p>
-            <a:r>
-              <a:t>Instruktion präzise: 'Es geht nicht um das, was Sie sagen würden – sondern um das, was Sie vorbereitet haben.'</a:t>
-            </a:r>
-          </a:p>
-          <a:p>
-            <a:r>
-              <a:t>Häufige Formulierungsfehler: Rückfrage klingt als verdeckter Vorwurf. Eingreifen: 'Stellen Sie sich vor, Sie sind der Mitarbeitende...'</a:t>
-            </a:r>
-          </a:p>
-          <a:p>
-            <a:r>
-              <a:t>AB-2 Situation 2 direkt mit AB-1 verknüpfen: Welche Quadrant-II-Blöcke müssen geschützt sein, damit die Formulierung stimmt?</a:t>
+              <a:t>Hilfsfrage für Zögernde: 'Welche Führungsaufgabe hat zuletzt keinen Platz gefunden?'</a:t>
+            </a:r>
+          </a:p>
+          <a:p>
+            <a:r>
+              <a:t>Drei Transfer-Aufgaben (Sec 5) kurz vorstellen: Zeitprotokoll führen, Blöcke halten, Rückfrage-Regel 3× erproben.</a:t>
+            </a:r>
+          </a:p>
+          <a:p>
+            <a:r>
+              <a:t>Selbstcheck nach 4 Wochen mitgeben – Teilnehmer markieren heute: Welche Frage würde ich jetzt schon mit Ja beantworten?</a:t>
             </a:r>
           </a:p>
         </p:txBody>
@@ -677,86 +672,6 @@
           <a:lstStyle/>
           <a:p>
             <a:r>
-              <a:t>Hilfsfrage für Zögernde: 'Welche Führungsaufgabe hat zuletzt keinen Platz gefunden?'</a:t>
-            </a:r>
-          </a:p>
-          <a:p>
-            <a:r>
-              <a:t>Drei Transfer-Aufgaben (Sec 5) kurz vorstellen: Zeitprotokoll führen, Blöcke halten, Rückfrage-Regel 3× erproben.</a:t>
-            </a:r>
-          </a:p>
-          <a:p>
-            <a:r>
-              <a:t>Selbstcheck nach 4 Wochen mitgeben – Teilnehmer markieren heute: Welche Frage würde ich jetzt schon mit Ja beantworten?</a:t>
-            </a:r>
-          </a:p>
-        </p:txBody>
-      </p:sp>
-      <p:sp>
-        <p:nvSpPr>
-          <p:cNvPr id="4" name="Slide Number Placeholder 3"/>
-          <p:cNvSpPr>
-            <a:spLocks noGrp="1"/>
-          </p:cNvSpPr>
-          <p:nvPr>
-            <p:ph type="sldNum" idx="5" sz="quarter"/>
-          </p:nvPr>
-        </p:nvSpPr>
-        <p:spPr/>
-      </p:sp>
-    </p:spTree>
-  </p:cSld>
-  <p:clrMapOvr>
-    <a:masterClrMapping/>
-  </p:clrMapOvr>
-</p:notes>
-</file>
-
-<file path=ppt/notesSlides/notesSlide12.xml><?xml version="1.0" encoding="utf-8"?>
-<p:notes xmlns:a="http://schemas.openxmlformats.org/drawingml/2006/main" xmlns:p="http://schemas.openxmlformats.org/presentationml/2006/main" xmlns:r="http://schemas.openxmlformats.org/officeDocument/2006/relationships">
-  <p:cSld>
-    <p:spTree>
-      <p:nvGrpSpPr>
-        <p:cNvPr id="1" name=""/>
-        <p:cNvGrpSpPr/>
-        <p:nvPr/>
-      </p:nvGrpSpPr>
-      <p:grpSpPr>
-        <a:xfrm>
-          <a:off x="0" y="0"/>
-          <a:ext cx="0" cy="0"/>
-          <a:chOff x="0" y="0"/>
-          <a:chExt cx="0" cy="0"/>
-        </a:xfrm>
-      </p:grpSpPr>
-      <p:sp>
-        <p:nvSpPr>
-          <p:cNvPr id="2" name="Slide Image Placeholder 1"/>
-          <p:cNvSpPr>
-            <a:spLocks noGrp="1"/>
-          </p:cNvSpPr>
-          <p:nvPr>
-            <p:ph type="sldImg" idx="2"/>
-          </p:nvPr>
-        </p:nvSpPr>
-        <p:spPr/>
-      </p:sp>
-      <p:sp>
-        <p:nvSpPr>
-          <p:cNvPr id="3" name="Notes Placeholder 2"/>
-          <p:cNvSpPr>
-            <a:spLocks noGrp="1"/>
-          </p:cNvSpPr>
-          <p:nvPr>
-            <p:ph type="body" idx="3" sz="quarter"/>
-          </p:nvPr>
-        </p:nvSpPr>
-        <p:spPr/>
-        <p:txBody>
-          <a:bodyPr/>
-          <a:lstStyle/>
-          <a:p>
-            <a:r>
               <a:t>Servant-Leadership-Impuls als Haltungsfolie – nicht als Appell, sondern als praktischer Prüfstein.</a:t>
             </a:r>
           </a:p>
@@ -842,7 +757,17 @@
           <a:lstStyle/>
           <a:p>
             <a:r>
-              <a:t>Siehe Trainerhandbuch (Sektion 3) für Moderationshinweise, Timing und erwartete Teilnehmerreaktionen.</a:t>
+              <a:t>Einstieg: Blitzlicht-Runde – jeder TN nennt seine aktuell größte Zeitfalle.</a:t>
+            </a:r>
+          </a:p>
+          <a:p>
+            <a:r>
+              <a:t>Nennungen am Flipchart notieren – werden im Verlauf als Referenzpunkte genutzt.</a:t>
+            </a:r>
+          </a:p>
+          <a:p>
+            <a:r>
+              <a:t>Häufigste Nennungen: Facharbeit-Falle, E-Mail-Reaktivität, Mitarbeitende bringen Probleme ohne Lösung.</a:t>
             </a:r>
           </a:p>
         </p:txBody>
@@ -912,17 +837,12 @@
           <a:lstStyle/>
           <a:p>
             <a:r>
-              <a:t>Einstieg: Blitzlicht-Runde – jeder TN nennt seine aktuell größte Zeitfalle.</a:t>
-            </a:r>
-          </a:p>
-          <a:p>
-            <a:r>
-              <a:t>Nennungen am Flipchart notieren – werden im Verlauf als Referenzpunkte genutzt.</a:t>
-            </a:r>
-          </a:p>
-          <a:p>
-            <a:r>
-              <a:t>Häufigste Nennungen: Facharbeit-Falle, E-Mail-Reaktivität, Mitarbeitende bringen Probleme ohne Lösung.</a:t>
+              <a:t>Drucker (1967): Wirksame Führungskräfte tun zuerst das Wichtige, nicht das Lauteste.</a:t>
+            </a:r>
+          </a:p>
+          <a:p>
+            <a:r>
+              <a:t>Kernbotschaft: Das Problem ist nicht Druck – es ist, dass Quadrant III oft wie Quadrant I wirkt.</a:t>
             </a:r>
           </a:p>
         </p:txBody>
@@ -992,12 +912,12 @@
           <a:lstStyle/>
           <a:p>
             <a:r>
-              <a:t>Drucker (1967): Wirksame Führungskräfte tun zuerst das Wichtige, nicht das Lauteste.</a:t>
-            </a:r>
-          </a:p>
-          <a:p>
-            <a:r>
-              <a:t>Kernbotschaft: Das Problem ist nicht Druck – es ist, dass Quadrant III oft wie Quadrant I wirkt.</a:t>
+              <a:t>Covey (1989): Big-Rocks-Metapher. Gefäß = Woche. Große Steine = Entwicklungsgespräch, Teamplanung, Steuerungsgesprächs-Vorbereitung.</a:t>
+            </a:r>
+          </a:p>
+          <a:p>
+            <a:r>
+              <a:t>Operative Konsequenz: Quadrant-II-Termin = gebuchter Termin mit sich selbst oder dem Mitarbeitenden – nicht Absicht.</a:t>
             </a:r>
           </a:p>
         </p:txBody>
@@ -1067,12 +987,22 @@
           <a:lstStyle/>
           <a:p>
             <a:r>
-              <a:t>Covey (1989): Big-Rocks-Metapher. Gefäß = Woche. Große Steine = Entwicklungsgespräch, Teamplanung, Steuerungsgesprächs-Vorbereitung.</a:t>
-            </a:r>
-          </a:p>
-          <a:p>
-            <a:r>
-              <a:t>Operative Konsequenz: Quadrant-II-Termin = gebuchter Termin mit sich selbst oder dem Mitarbeitenden – nicht Absicht.</a:t>
+              <a:t>Einstiegsfrage: 'Was fällt Ihnen als erstes auf?' – 3–4 Antworten, dann live an Tafel kategorisieren.</a:t>
+            </a:r>
+          </a:p>
+          <a:p>
+            <a:r>
+              <a:t>Befund: 3 h Quadrant II = &lt; 8 % der Arbeitszeit. Fast immer Wiedererkennungsreaktion im Raum.</a:t>
+            </a:r>
+          </a:p>
+          <a:p>
+            <a:r>
+              <a:t>Nach der Reaktion: 'Wer würde sagen, bei sich sieht das ähnlich aus?' – Hände zeigen lassen.</a:t>
+            </a:r>
+          </a:p>
+          <a:p>
+            <a:r>
+              <a:t>* Kreditausarbeitungen: Rollenklärung überlagert Quadrant-Frage. Nicht: 'Ist das wichtig?' Sondern: 'Ist das Sandras Aufgabe als TL?'</a:t>
             </a:r>
           </a:p>
         </p:txBody>
@@ -1142,22 +1072,22 @@
           <a:lstStyle/>
           <a:p>
             <a:r>
-              <a:t>Einstiegsfrage: 'Was fällt Ihnen als erstes auf?' – 3–4 Antworten, dann live an Tafel kategorisieren.</a:t>
-            </a:r>
-          </a:p>
-          <a:p>
-            <a:r>
-              <a:t>Befund: 3 h Quadrant II = &lt; 8 % der Arbeitszeit. Fast immer Wiedererkennungsreaktion im Raum.</a:t>
-            </a:r>
-          </a:p>
-          <a:p>
-            <a:r>
-              <a:t>Nach der Reaktion: 'Wer würde sagen, bei sich sieht das ähnlich aus?' – Hände zeigen lassen.</a:t>
-            </a:r>
-          </a:p>
-          <a:p>
-            <a:r>
-              <a:t>* Kreditausarbeitungen: Rollenklärung überlagert Quadrant-Frage. Nicht: 'Ist das wichtig?' Sondern: 'Ist das Sandras Aufgabe als TL?'</a:t>
+              <a:t>AB-1 bleibt beim TN. Kommunizieren: 'Das ist kein Test – das ist eine ehrliche Diagnose.'</a:t>
+            </a:r>
+          </a:p>
+          <a:p>
+            <a:r>
+              <a:t>Nach dem Ausfüllen: 2–3 Min. Stille aushalten, bevor aufgerufen wird. Produktiv.</a:t>
+            </a:r>
+          </a:p>
+          <a:p>
+            <a:r>
+              <a:t>Plenum: nur Teil 2 und Teil 3. Teil 4 (Blockungsplanung) kommt nach AB-2.</a:t>
+            </a:r>
+          </a:p>
+          <a:p>
+            <a:r>
+              <a:t>Häufige Erkenntnis: Quadrant-II-Anteil liegt unter 10 % – meistens überrascht das.</a:t>
             </a:r>
           </a:p>
         </p:txBody>
@@ -1227,22 +1157,22 @@
           <a:lstStyle/>
           <a:p>
             <a:r>
-              <a:t>AB-1 bleibt beim TN. Kommunizieren: 'Das ist kein Test – das ist eine ehrliche Diagnose.'</a:t>
-            </a:r>
-          </a:p>
-          <a:p>
-            <a:r>
-              <a:t>Nach dem Ausfüllen: 2–3 Min. Stille aushalten, bevor aufgerufen wird. Produktiv.</a:t>
-            </a:r>
-          </a:p>
-          <a:p>
-            <a:r>
-              <a:t>Plenum: nur Teil 2 und Teil 3. Teil 4 (Blockungsplanung) kommt nach AB-2.</a:t>
-            </a:r>
-          </a:p>
-          <a:p>
-            <a:r>
-              <a:t>Häufige Erkenntnis: Quadrant-II-Anteil liegt unter 10 % – meistens überrascht das.</a:t>
+              <a:t>Oncken &amp; Wass (1974): Monkey-Management-Muster. Wort 'Affe' einprägsam – bewusst nutzen.</a:t>
+            </a:r>
+          </a:p>
+          <a:p>
+            <a:r>
+              <a:t>Szenario Sandra + Marco (Bäckerei Wagner) kurz aufbauen, bevor Begriff eingeführt wird.</a:t>
+            </a:r>
+          </a:p>
+          <a:p>
+            <a:r>
+              <a:t>Häufigste Reaktion: 'Das klingt kalt – ich will für mein Team da sein.'</a:t>
+            </a:r>
+          </a:p>
+          <a:p>
+            <a:r>
+              <a:t>Normalisierung: 'Für das Team da sein = es entwickeln. Wer das Problem übernimmt, übernimmt die Lernchance.'</a:t>
             </a:r>
           </a:p>
         </p:txBody>
@@ -1312,22 +1242,22 @@
           <a:lstStyle/>
           <a:p>
             <a:r>
-              <a:t>Oncken &amp; Wass (1974): Monkey-Management-Muster. Wort 'Affe' einprägsam – bewusst nutzen.</a:t>
-            </a:r>
-          </a:p>
-          <a:p>
-            <a:r>
-              <a:t>Szenario Sandra + Marco (Bäckerei Wagner) kurz aufbauen, bevor Begriff eingeführt wird.</a:t>
-            </a:r>
-          </a:p>
-          <a:p>
-            <a:r>
-              <a:t>Häufigste Reaktion: 'Das klingt kalt – ich will für mein Team da sein.'</a:t>
-            </a:r>
-          </a:p>
-          <a:p>
-            <a:r>
-              <a:t>Normalisierung: 'Für das Team da sein = es entwickeln. Wer das Problem übernimmt, übernimmt die Lernchance.'</a:t>
+              <a:t>Einwand antizipieren: 'Nach unten klappt das – aber nach oben trau ich mich nicht.'</a:t>
+            </a:r>
+          </a:p>
+          <a:p>
+            <a:r>
+              <a:t>Schlüsselwort: Transparenz über Prioritäten, nicht Konfrontation.</a:t>
+            </a:r>
+          </a:p>
+          <a:p>
+            <a:r>
+              <a:t>Formulierungsbaustein für nach oben wörtlich zeigen: 'Ich kann das machen – dann fällt [konkrete Führungsaufgabe] diese Woche weg. Ist das in Ordnung?'</a:t>
+            </a:r>
+          </a:p>
+          <a:p>
+            <a:r>
+              <a:t>Konsequenz: Wer nicht fragt, entscheidet – nur unsichtbar. Und meistens zuungunsten von Quadrant II.</a:t>
             </a:r>
           </a:p>
         </p:txBody>
@@ -1397,22 +1327,22 @@
           <a:lstStyle/>
           <a:p>
             <a:r>
-              <a:t>Einwand antizipieren: 'Nach unten klappt das – aber nach oben trau ich mich nicht.'</a:t>
-            </a:r>
-          </a:p>
-          <a:p>
-            <a:r>
-              <a:t>Schlüsselwort: Transparenz über Prioritäten, nicht Konfrontation.</a:t>
-            </a:r>
-          </a:p>
-          <a:p>
-            <a:r>
-              <a:t>Formulierungsbaustein für nach oben wörtlich zeigen: 'Ich kann das machen – dann fällt [konkrete Führungsaufgabe] diese Woche weg. Ist das in Ordnung?'</a:t>
-            </a:r>
-          </a:p>
-          <a:p>
-            <a:r>
-              <a:t>Konsequenz: Wer nicht fragt, entscheidet – nur unsichtbar. Und meistens zuungunsten von Quadrant II.</a:t>
+              <a:t>Kein Rollenspiel. Textarbeit: Satz aufschreiben, laut vorlesen, Rückmeldung: 'Wenn ich das höre – will ich antworten oder mich verteidigen?'</a:t>
+            </a:r>
+          </a:p>
+          <a:p>
+            <a:r>
+              <a:t>Instruktion präzise: 'Es geht nicht um das, was Sie sagen würden – sondern um das, was Sie vorbereitet haben.'</a:t>
+            </a:r>
+          </a:p>
+          <a:p>
+            <a:r>
+              <a:t>Häufige Formulierungsfehler: Rückfrage klingt als verdeckter Vorwurf. Eingreifen: 'Stellen Sie sich vor, Sie sind der Mitarbeitende...'</a:t>
+            </a:r>
+          </a:p>
+          <a:p>
+            <a:r>
+              <a:t>AB-2 Situation 2 direkt mit AB-1 verknüpfen: Welche Quadrant-II-Blöcke müssen geschützt sein, damit die Formulierung stimmt?</a:t>
             </a:r>
           </a:p>
         </p:txBody>
@@ -11109,7 +11039,7 @@
             <a:avLst/>
           </a:prstGeom>
           <a:solidFill>
-            <a:srgbClr val="EDEDF3"/>
+            <a:srgbClr val="1F2C56"/>
           </a:solidFill>
           <a:ln>
             <a:noFill/>
@@ -11145,129 +11075,8 @@
         </p:nvSpPr>
         <p:spPr>
           <a:xfrm>
-            <a:off x="0" y="0"/>
-            <a:ext cx="12188952" cy="50292"/>
-          </a:xfrm>
-          <a:prstGeom prst="rect">
-            <a:avLst/>
-          </a:prstGeom>
-          <a:solidFill>
-            <a:srgbClr val="1F2C56"/>
-          </a:solidFill>
-          <a:ln>
-            <a:noFill/>
-          </a:ln>
-        </p:spPr>
-        <p:style>
-          <a:lnRef idx="1">
-            <a:schemeClr val="accent1"/>
-          </a:lnRef>
-          <a:fillRef idx="3">
-            <a:schemeClr val="accent1"/>
-          </a:fillRef>
-          <a:effectRef idx="2">
-            <a:schemeClr val="accent1"/>
-          </a:effectRef>
-          <a:fontRef idx="minor">
-            <a:schemeClr val="lt1"/>
-          </a:fontRef>
-        </p:style>
-        <p:txBody>
-          <a:bodyPr rtlCol="0" anchor="ctr"/>
-          <a:lstStyle/>
-          <a:p>
-            <a:pPr algn="ctr"/>
-          </a:p>
-        </p:txBody>
-      </p:sp>
-      <p:sp>
-        <p:nvSpPr>
-          <p:cNvPr id="4" name="TextBox 3"/>
-          <p:cNvSpPr txBox="1"/>
-          <p:nvPr/>
-        </p:nvSpPr>
-        <p:spPr>
-          <a:xfrm>
-            <a:off x="685800" y="109728"/>
-            <a:ext cx="10817352" cy="228600"/>
-          </a:xfrm>
-          <a:prstGeom prst="rect">
-            <a:avLst/>
-          </a:prstGeom>
-          <a:noFill/>
-        </p:spPr>
-        <p:txBody>
-          <a:bodyPr wrap="none">
-            <a:spAutoFit/>
-          </a:bodyPr>
-          <a:lstStyle/>
-          <a:p>
-            <a:pPr algn="l"/>
-            <a:r>
-              <a:rPr sz="750">
-                <a:solidFill>
-                  <a:srgbClr val="78808C"/>
-                </a:solidFill>
-                <a:latin typeface="Consolas"/>
-              </a:rPr>
-              <a:t>TL01  ·  INHALT</a:t>
-            </a:r>
-          </a:p>
-        </p:txBody>
-      </p:sp>
-      <p:sp>
-        <p:nvSpPr>
-          <p:cNvPr id="5" name="Rectangle 4"/>
-          <p:cNvSpPr/>
-          <p:nvPr/>
-        </p:nvSpPr>
-        <p:spPr>
-          <a:xfrm>
-            <a:off x="0" y="1234440"/>
-            <a:ext cx="12188952" cy="12700"/>
-          </a:xfrm>
-          <a:prstGeom prst="rect">
-            <a:avLst/>
-          </a:prstGeom>
-          <a:solidFill>
-            <a:srgbClr val="D8DFE4"/>
-          </a:solidFill>
-          <a:ln>
-            <a:noFill/>
-          </a:ln>
-        </p:spPr>
-        <p:style>
-          <a:lnRef idx="1">
-            <a:schemeClr val="accent1"/>
-          </a:lnRef>
-          <a:fillRef idx="3">
-            <a:schemeClr val="accent1"/>
-          </a:fillRef>
-          <a:effectRef idx="2">
-            <a:schemeClr val="accent1"/>
-          </a:effectRef>
-          <a:fontRef idx="minor">
-            <a:schemeClr val="lt1"/>
-          </a:fontRef>
-        </p:style>
-        <p:txBody>
-          <a:bodyPr rtlCol="0" anchor="ctr"/>
-          <a:lstStyle/>
-          <a:p>
-            <a:pPr algn="ctr"/>
-          </a:p>
-        </p:txBody>
-      </p:sp>
-      <p:sp>
-        <p:nvSpPr>
-          <p:cNvPr id="6" name="Rectangle 5"/>
-          <p:cNvSpPr/>
-          <p:nvPr/>
-        </p:nvSpPr>
-        <p:spPr>
-          <a:xfrm>
-            <a:off x="685800" y="502920"/>
-            <a:ext cx="36576" cy="658368"/>
+            <a:off x="685800" y="2788920"/>
+            <a:ext cx="548640" cy="38100"/>
           </a:xfrm>
           <a:prstGeom prst="rect">
             <a:avLst/>
@@ -11303,14 +11112,14 @@
       </p:sp>
       <p:sp>
         <p:nvSpPr>
-          <p:cNvPr id="7" name="TextBox 6"/>
+          <p:cNvPr id="4" name="TextBox 3"/>
           <p:cNvSpPr txBox="1"/>
           <p:nvPr/>
         </p:nvSpPr>
         <p:spPr>
           <a:xfrm>
-            <a:off x="813816" y="502920"/>
-            <a:ext cx="10634472" cy="685800"/>
+            <a:off x="685800" y="3017520"/>
+            <a:ext cx="10817352" cy="1463040"/>
           </a:xfrm>
           <a:prstGeom prst="rect">
             <a:avLst/>
@@ -11325,9 +11134,9 @@
           <a:p>
             <a:pPr algn="l"/>
             <a:r>
-              <a:rPr sz="2400" b="1" i="0">
-                <a:solidFill>
-                  <a:srgbClr val="1F2C56"/>
+              <a:rPr sz="4000" b="1" i="0">
+                <a:solidFill>
+                  <a:srgbClr val="FFFFFF"/>
                 </a:solidFill>
                 <a:latin typeface="Arial"/>
               </a:rPr>
@@ -11338,57 +11147,49 @@
       </p:sp>
       <p:sp>
         <p:nvSpPr>
-          <p:cNvPr id="8" name="Rectangle 7"/>
-          <p:cNvSpPr/>
-          <p:nvPr/>
-        </p:nvSpPr>
-        <p:spPr>
-          <a:xfrm>
-            <a:off x="0" y="6510528"/>
-            <a:ext cx="12188952" cy="347472"/>
-          </a:xfrm>
-          <a:prstGeom prst="rect">
-            <a:avLst/>
-          </a:prstGeom>
-          <a:solidFill>
-            <a:srgbClr val="0A1937"/>
-          </a:solidFill>
-          <a:ln>
-            <a:noFill/>
-          </a:ln>
-        </p:spPr>
-        <p:style>
-          <a:lnRef idx="1">
-            <a:schemeClr val="accent1"/>
-          </a:lnRef>
-          <a:fillRef idx="3">
-            <a:schemeClr val="accent1"/>
-          </a:fillRef>
-          <a:effectRef idx="2">
-            <a:schemeClr val="accent1"/>
-          </a:effectRef>
-          <a:fontRef idx="minor">
-            <a:schemeClr val="lt1"/>
-          </a:fontRef>
-        </p:style>
-        <p:txBody>
-          <a:bodyPr rtlCol="0" anchor="ctr"/>
-          <a:lstStyle/>
-          <a:p>
-            <a:pPr algn="ctr"/>
-          </a:p>
-        </p:txBody>
-      </p:sp>
-      <p:sp>
-        <p:nvSpPr>
-          <p:cNvPr id="9" name="TextBox 8"/>
+          <p:cNvPr id="5" name="TextBox 4"/>
           <p:cNvSpPr txBox="1"/>
           <p:nvPr/>
         </p:nvSpPr>
         <p:spPr>
           <a:xfrm>
-            <a:off x="685800" y="6583680"/>
-            <a:ext cx="6490411" cy="256032"/>
+            <a:off x="685800" y="4480560"/>
+            <a:ext cx="8653881" cy="1280160"/>
+          </a:xfrm>
+          <a:prstGeom prst="rect">
+            <a:avLst/>
+          </a:prstGeom>
+          <a:noFill/>
+        </p:spPr>
+        <p:txBody>
+          <a:bodyPr wrap="square">
+            <a:spAutoFit/>
+          </a:bodyPr>
+          <a:lstStyle/>
+          <a:p>
+            <a:pPr algn="l"/>
+            <a:r>
+              <a:rPr sz="1600" b="0" i="0">
+                <a:solidFill>
+                  <a:srgbClr val="C8D2E6"/>
+                </a:solidFill>
+                <a:latin typeface="Arial"/>
+              </a:rPr>
+              <a:t>Warum der volle Kalender kein Zeitproblem ist – sondern ein Prioritätenproblem</a:t>
+            </a:r>
+          </a:p>
+        </p:txBody>
+      </p:sp>
+      <p:sp>
+        <p:nvSpPr>
+          <p:cNvPr id="6" name="TextBox 5"/>
+          <p:cNvSpPr txBox="1"/>
+          <p:nvPr/>
+        </p:nvSpPr>
+        <p:spPr>
+          <a:xfrm>
+            <a:off x="685800" y="6355080"/>
+            <a:ext cx="10817352" cy="274320"/>
           </a:xfrm>
           <a:prstGeom prst="rect">
             <a:avLst/>
@@ -11405,7 +11206,7 @@
             <a:r>
               <a:rPr sz="700">
                 <a:solidFill>
-                  <a:srgbClr val="A0B4D2"/>
+                  <a:srgbClr val="8CA0C3"/>
                 </a:solidFill>
                 <a:latin typeface="Consolas"/>
               </a:rPr>
